--- a/base_ppt/templates/template.pptx
+++ b/base_ppt/templates/template.pptx
@@ -18814,7 +18814,7 @@
         </p:nvSpPr>
         <p:spPr>
           <a:xfrm>
-            <a:off x="3348000" y="3924935"/>
+            <a:off x="3201950" y="3924935"/>
             <a:ext cx="5789295" cy="2376170"/>
           </a:xfrm>
           <a:prstGeom prst="rect">
